--- a/docs/onboarding/pptx/03-staff.pptx
+++ b/docs/onboarding/pptx/03-staff.pptx
@@ -4521,7 +4521,7 @@
         <p:spPr>
           <a:xfrm>
             <a:off x="841248" y="1353312"/>
-            <a:ext cx="10509199" cy="868680"/>
+            <a:ext cx="5120640" cy="1280160"/>
           </a:xfrm>
           <a:prstGeom prst="rect">
             <a:avLst/>
@@ -4535,7 +4535,7 @@
           <a:lstStyle/>
           <a:p>
             <a:r>
-              <a:rPr sz="3000" b="1" spc="-40">
+              <a:rPr sz="2700" b="1" spc="-40">
                 <a:solidFill>
                   <a:srgbClr val="0A0A0A"/>
                 </a:solidFill>
@@ -4554,8 +4554,8 @@
         </p:nvSpPr>
         <p:spPr>
           <a:xfrm>
-            <a:off x="841248" y="2194560"/>
-            <a:ext cx="9601200" cy="822960"/>
+            <a:off x="841248" y="1938528"/>
+            <a:ext cx="5120640" cy="1097280"/>
           </a:xfrm>
           <a:prstGeom prst="rect">
             <a:avLst/>
@@ -4570,11 +4570,11 @@
           <a:p>
             <a:pPr>
               <a:lnSpc>
-                <a:spcPct val="135000"/>
+                <a:spcPct val="130000"/>
               </a:lnSpc>
             </a:pPr>
             <a:r>
-              <a:rPr sz="1400" b="0">
+              <a:rPr sz="1300" b="0">
                 <a:solidFill>
                   <a:srgbClr val="52525B"/>
                 </a:solidFill>
@@ -4593,8 +4593,8 @@
         </p:nvSpPr>
         <p:spPr>
           <a:xfrm>
-            <a:off x="841248" y="2651760"/>
-            <a:ext cx="10509199" cy="566928"/>
+            <a:off x="841248" y="2633472"/>
+            <a:ext cx="5120640" cy="713232"/>
           </a:xfrm>
           <a:prstGeom prst="rect">
             <a:avLst/>
@@ -4607,8 +4607,13 @@
           </a:bodyPr>
           <a:lstStyle/>
           <a:p>
-            <a:r>
-              <a:rPr sz="1450" b="1">
+            <a:pPr>
+              <a:lnSpc>
+                <a:spcPct val="125000"/>
+              </a:lnSpc>
+            </a:pPr>
+            <a:r>
+              <a:rPr sz="1300" b="1">
                 <a:solidFill>
                   <a:srgbClr val="0A0A0A"/>
                 </a:solidFill>
@@ -4617,7 +4622,7 @@
               <a:t>Oferta actual:  </a:t>
             </a:r>
             <a:r>
-              <a:rPr sz="1450" b="0">
+              <a:rPr sz="1300" b="0">
                 <a:solidFill>
                   <a:srgbClr val="52525B"/>
                 </a:solidFill>
@@ -4630,23 +4635,171 @@
       </p:sp>
       <p:sp>
         <p:nvSpPr>
-          <p:cNvPr id="7" name="Rectangle 6"/>
+          <p:cNvPr id="7" name="TextBox 6"/>
+          <p:cNvSpPr txBox="1"/>
+          <p:nvPr/>
+        </p:nvSpPr>
+        <p:spPr>
+          <a:xfrm>
+            <a:off x="841248" y="3346704"/>
+            <a:ext cx="5120640" cy="713232"/>
+          </a:xfrm>
+          <a:prstGeom prst="rect">
+            <a:avLst/>
+          </a:prstGeom>
+          <a:noFill/>
+        </p:spPr>
+        <p:txBody>
+          <a:bodyPr wrap="square" anchor="ctr" lIns="0" rIns="0" tIns="0" bIns="0">
+            <a:spAutoFit/>
+          </a:bodyPr>
+          <a:lstStyle/>
+          <a:p>
+            <a:pPr>
+              <a:lnSpc>
+                <a:spcPct val="125000"/>
+              </a:lnSpc>
+            </a:pPr>
+            <a:r>
+              <a:rPr sz="1300" b="1">
+                <a:solidFill>
+                  <a:srgbClr val="0A0A0A"/>
+                </a:solidFill>
+                <a:latin typeface="Calibri"/>
+              </a:rPr>
+              <a:t>Tiempo:  </a:t>
+            </a:r>
+            <a:r>
+              <a:rPr sz="1300" b="0">
+                <a:solidFill>
+                  <a:srgbClr val="52525B"/>
+                </a:solidFill>
+                <a:latin typeface="Calibri"/>
+              </a:rPr>
+              <a:t>cuándo cierra; el anti-sniping puede extenderlo si hay pujas de último momento.</a:t>
+            </a:r>
+          </a:p>
+        </p:txBody>
+      </p:sp>
+      <p:sp>
+        <p:nvSpPr>
+          <p:cNvPr id="8" name="TextBox 7"/>
+          <p:cNvSpPr txBox="1"/>
+          <p:nvPr/>
+        </p:nvSpPr>
+        <p:spPr>
+          <a:xfrm>
+            <a:off x="841248" y="4059936"/>
+            <a:ext cx="5120640" cy="713232"/>
+          </a:xfrm>
+          <a:prstGeom prst="rect">
+            <a:avLst/>
+          </a:prstGeom>
+          <a:noFill/>
+        </p:spPr>
+        <p:txBody>
+          <a:bodyPr wrap="square" anchor="ctr" lIns="0" rIns="0" tIns="0" bIns="0">
+            <a:spAutoFit/>
+          </a:bodyPr>
+          <a:lstStyle/>
+          <a:p>
+            <a:pPr>
+              <a:lnSpc>
+                <a:spcPct val="125000"/>
+              </a:lnSpc>
+            </a:pPr>
+            <a:r>
+              <a:rPr sz="1300" b="1">
+                <a:solidFill>
+                  <a:srgbClr val="0A0A0A"/>
+                </a:solidFill>
+                <a:latin typeface="Calibri"/>
+              </a:rPr>
+              <a:t>Estado y resultado:  </a:t>
+            </a:r>
+            <a:r>
+              <a:rPr sz="1300" b="0">
+                <a:solidFill>
+                  <a:srgbClr val="52525B"/>
+                </a:solidFill>
+                <a:latin typeface="Calibri"/>
+              </a:rPr>
+              <a:t>programada, en vivo, finalizada; y el resultado al cerrar.</a:t>
+            </a:r>
+          </a:p>
+        </p:txBody>
+      </p:sp>
+      <p:sp>
+        <p:nvSpPr>
+          <p:cNvPr id="9" name="TextBox 8"/>
+          <p:cNvSpPr txBox="1"/>
+          <p:nvPr/>
+        </p:nvSpPr>
+        <p:spPr>
+          <a:xfrm>
+            <a:off x="841248" y="4773168"/>
+            <a:ext cx="5120640" cy="713232"/>
+          </a:xfrm>
+          <a:prstGeom prst="rect">
+            <a:avLst/>
+          </a:prstGeom>
+          <a:noFill/>
+        </p:spPr>
+        <p:txBody>
+          <a:bodyPr wrap="square" anchor="ctr" lIns="0" rIns="0" tIns="0" bIns="0">
+            <a:spAutoFit/>
+          </a:bodyPr>
+          <a:lstStyle/>
+          <a:p>
+            <a:pPr>
+              <a:lnSpc>
+                <a:spcPct val="125000"/>
+              </a:lnSpc>
+            </a:pPr>
+            <a:r>
+              <a:rPr sz="1300" b="1">
+                <a:solidFill>
+                  <a:srgbClr val="0A0A0A"/>
+                </a:solidFill>
+                <a:latin typeface="Calibri"/>
+              </a:rPr>
+              <a:t>Ganador:  </a:t>
+            </a:r>
+            <a:r>
+              <a:rPr sz="1300" b="0">
+                <a:solidFill>
+                  <a:srgbClr val="52525B"/>
+                </a:solidFill>
+                <a:latin typeface="Calibri"/>
+              </a:rPr>
+              <a:t>al venderse, ves nombre y correo del ganador.</a:t>
+            </a:r>
+          </a:p>
+        </p:txBody>
+      </p:sp>
+      <p:sp>
+        <p:nvSpPr>
+          <p:cNvPr id="10" name="Rounded Rectangle 9"/>
           <p:cNvSpPr/>
           <p:nvPr/>
         </p:nvSpPr>
         <p:spPr>
           <a:xfrm>
-            <a:off x="841248" y="3217788"/>
-            <a:ext cx="10509199" cy="900"/>
-          </a:xfrm>
-          <a:prstGeom prst="rect">
-            <a:avLst/>
+            <a:off x="6419088" y="932688"/>
+            <a:ext cx="4931359" cy="5010912"/>
+          </a:xfrm>
+          <a:prstGeom prst="roundRect">
+            <a:avLst>
+              <a:gd name="adj" fmla="val 4000"/>
+            </a:avLst>
           </a:prstGeom>
           <a:solidFill>
-            <a:srgbClr val="E4E4E7"/>
+            <a:srgbClr val="F1F1F3"/>
           </a:solidFill>
-          <a:ln>
-            <a:noFill/>
+          <a:ln w="12700">
+            <a:solidFill>
+              <a:srgbClr val="A1A1AA"/>
+            </a:solidFill>
           </a:ln>
           <a:effectLst/>
         </p:spPr>
@@ -4665,277 +4818,37 @@
           </a:fontRef>
         </p:style>
         <p:txBody>
-          <a:bodyPr rtlCol="0" anchor="ctr"/>
+          <a:bodyPr rtlCol="0" anchor="ctr" wrap="square"/>
           <a:lstStyle/>
           <a:p>
             <a:pPr algn="ctr"/>
-          </a:p>
-        </p:txBody>
-      </p:sp>
-      <p:sp>
-        <p:nvSpPr>
-          <p:cNvPr id="8" name="TextBox 7"/>
-          <p:cNvSpPr txBox="1"/>
-          <p:nvPr/>
-        </p:nvSpPr>
-        <p:spPr>
-          <a:xfrm>
-            <a:off x="841248" y="3218688"/>
-            <a:ext cx="10509199" cy="566928"/>
-          </a:xfrm>
-          <a:prstGeom prst="rect">
-            <a:avLst/>
-          </a:prstGeom>
-          <a:noFill/>
-        </p:spPr>
-        <p:txBody>
-          <a:bodyPr wrap="square" anchor="ctr" lIns="0" rIns="0" tIns="0" bIns="0">
-            <a:spAutoFit/>
-          </a:bodyPr>
-          <a:lstStyle/>
-          <a:p>
-            <a:r>
-              <a:rPr sz="1450" b="1">
-                <a:solidFill>
-                  <a:srgbClr val="0A0A0A"/>
-                </a:solidFill>
-                <a:latin typeface="Calibri"/>
-              </a:rPr>
-              <a:t>Tiempo:  </a:t>
-            </a:r>
-            <a:r>
-              <a:rPr sz="1450" b="0">
-                <a:solidFill>
-                  <a:srgbClr val="52525B"/>
-                </a:solidFill>
-                <a:latin typeface="Calibri"/>
-              </a:rPr>
-              <a:t>cuándo cierra; el anti-sniping puede extenderlo si hay pujas de último momento.</a:t>
-            </a:r>
-          </a:p>
-        </p:txBody>
-      </p:sp>
-      <p:sp>
-        <p:nvSpPr>
-          <p:cNvPr id="9" name="Rectangle 8"/>
-          <p:cNvSpPr/>
-          <p:nvPr/>
-        </p:nvSpPr>
-        <p:spPr>
-          <a:xfrm>
-            <a:off x="841248" y="3784716"/>
-            <a:ext cx="10509199" cy="900"/>
-          </a:xfrm>
-          <a:prstGeom prst="rect">
-            <a:avLst/>
-          </a:prstGeom>
-          <a:solidFill>
-            <a:srgbClr val="E4E4E7"/>
-          </a:solidFill>
-          <a:ln>
-            <a:noFill/>
-          </a:ln>
-          <a:effectLst/>
-        </p:spPr>
-        <p:style>
-          <a:lnRef idx="1">
-            <a:schemeClr val="accent1"/>
-          </a:lnRef>
-          <a:fillRef idx="3">
-            <a:schemeClr val="accent1"/>
-          </a:fillRef>
-          <a:effectRef idx="2">
-            <a:schemeClr val="accent1"/>
-          </a:effectRef>
-          <a:fontRef idx="minor">
-            <a:schemeClr val="lt1"/>
-          </a:fontRef>
-        </p:style>
-        <p:txBody>
-          <a:bodyPr rtlCol="0" anchor="ctr"/>
-          <a:lstStyle/>
+            <a:r>
+              <a:rPr sz="1200" b="1" spc="120">
+                <a:solidFill>
+                  <a:srgbClr val="71717A"/>
+                </a:solidFill>
+                <a:latin typeface="Calibri"/>
+              </a:rPr>
+              <a:t>CAPTURA PENDIENTE</a:t>
+            </a:r>
+          </a:p>
           <a:p>
             <a:pPr algn="ctr"/>
-          </a:p>
-        </p:txBody>
-      </p:sp>
-      <p:sp>
-        <p:nvSpPr>
-          <p:cNvPr id="10" name="TextBox 9"/>
-          <p:cNvSpPr txBox="1"/>
-          <p:nvPr/>
-        </p:nvSpPr>
-        <p:spPr>
-          <a:xfrm>
-            <a:off x="841248" y="3785616"/>
-            <a:ext cx="10509199" cy="566928"/>
-          </a:xfrm>
-          <a:prstGeom prst="rect">
-            <a:avLst/>
-          </a:prstGeom>
-          <a:noFill/>
-        </p:spPr>
-        <p:txBody>
-          <a:bodyPr wrap="square" anchor="ctr" lIns="0" rIns="0" tIns="0" bIns="0">
-            <a:spAutoFit/>
-          </a:bodyPr>
-          <a:lstStyle/>
-          <a:p>
-            <a:r>
-              <a:rPr sz="1450" b="1">
-                <a:solidFill>
-                  <a:srgbClr val="0A0A0A"/>
-                </a:solidFill>
-                <a:latin typeface="Calibri"/>
-              </a:rPr>
-              <a:t>Estado y resultado:  </a:t>
-            </a:r>
-            <a:r>
-              <a:rPr sz="1450" b="0">
-                <a:solidFill>
-                  <a:srgbClr val="52525B"/>
-                </a:solidFill>
-                <a:latin typeface="Calibri"/>
-              </a:rPr>
-              <a:t>programada, en vivo, finalizada; y el resultado al cerrar.</a:t>
-            </a:r>
-          </a:p>
-        </p:txBody>
-      </p:sp>
-      <p:sp>
-        <p:nvSpPr>
-          <p:cNvPr id="11" name="Rectangle 10"/>
-          <p:cNvSpPr/>
-          <p:nvPr/>
-        </p:nvSpPr>
-        <p:spPr>
-          <a:xfrm>
-            <a:off x="841248" y="4351644"/>
-            <a:ext cx="10509199" cy="900"/>
-          </a:xfrm>
-          <a:prstGeom prst="rect">
-            <a:avLst/>
-          </a:prstGeom>
-          <a:solidFill>
-            <a:srgbClr val="E4E4E7"/>
-          </a:solidFill>
-          <a:ln>
-            <a:noFill/>
-          </a:ln>
-          <a:effectLst/>
-        </p:spPr>
-        <p:style>
-          <a:lnRef idx="1">
-            <a:schemeClr val="accent1"/>
-          </a:lnRef>
-          <a:fillRef idx="3">
-            <a:schemeClr val="accent1"/>
-          </a:fillRef>
-          <a:effectRef idx="2">
-            <a:schemeClr val="accent1"/>
-          </a:effectRef>
-          <a:fontRef idx="minor">
-            <a:schemeClr val="lt1"/>
-          </a:fontRef>
-        </p:style>
-        <p:txBody>
-          <a:bodyPr rtlCol="0" anchor="ctr"/>
-          <a:lstStyle/>
-          <a:p>
-            <a:pPr algn="ctr"/>
-          </a:p>
-        </p:txBody>
-      </p:sp>
-      <p:sp>
-        <p:nvSpPr>
-          <p:cNvPr id="12" name="TextBox 11"/>
-          <p:cNvSpPr txBox="1"/>
-          <p:nvPr/>
-        </p:nvSpPr>
-        <p:spPr>
-          <a:xfrm>
-            <a:off x="841248" y="4352544"/>
-            <a:ext cx="10509199" cy="566928"/>
-          </a:xfrm>
-          <a:prstGeom prst="rect">
-            <a:avLst/>
-          </a:prstGeom>
-          <a:noFill/>
-        </p:spPr>
-        <p:txBody>
-          <a:bodyPr wrap="square" anchor="ctr" lIns="0" rIns="0" tIns="0" bIns="0">
-            <a:spAutoFit/>
-          </a:bodyPr>
-          <a:lstStyle/>
-          <a:p>
-            <a:r>
-              <a:rPr sz="1450" b="1">
-                <a:solidFill>
-                  <a:srgbClr val="0A0A0A"/>
-                </a:solidFill>
-                <a:latin typeface="Calibri"/>
-              </a:rPr>
-              <a:t>Ganador:  </a:t>
-            </a:r>
-            <a:r>
-              <a:rPr sz="1450" b="0">
-                <a:solidFill>
-                  <a:srgbClr val="52525B"/>
-                </a:solidFill>
-                <a:latin typeface="Calibri"/>
-              </a:rPr>
-              <a:t>al venderse, ves nombre y correo del ganador.</a:t>
-            </a:r>
-          </a:p>
-        </p:txBody>
-      </p:sp>
-      <p:sp>
-        <p:nvSpPr>
-          <p:cNvPr id="13" name="Rectangle 12"/>
-          <p:cNvSpPr/>
-          <p:nvPr/>
-        </p:nvSpPr>
-        <p:spPr>
-          <a:xfrm>
-            <a:off x="841248" y="4918572"/>
-            <a:ext cx="10509199" cy="900"/>
-          </a:xfrm>
-          <a:prstGeom prst="rect">
-            <a:avLst/>
-          </a:prstGeom>
-          <a:solidFill>
-            <a:srgbClr val="E4E4E7"/>
-          </a:solidFill>
-          <a:ln>
-            <a:noFill/>
-          </a:ln>
-          <a:effectLst/>
-        </p:spPr>
-        <p:style>
-          <a:lnRef idx="1">
-            <a:schemeClr val="accent1"/>
-          </a:lnRef>
-          <a:fillRef idx="3">
-            <a:schemeClr val="accent1"/>
-          </a:fillRef>
-          <a:effectRef idx="2">
-            <a:schemeClr val="accent1"/>
-          </a:effectRef>
-          <a:fontRef idx="minor">
-            <a:schemeClr val="lt1"/>
-          </a:fontRef>
-        </p:style>
-        <p:txBody>
-          <a:bodyPr rtlCol="0" anchor="ctr"/>
-          <a:lstStyle/>
-          <a:p>
-            <a:pPr algn="ctr"/>
+            <a:r>
+              <a:rPr sz="1050" b="0">
+                <a:solidFill>
+                  <a:srgbClr val="A1A1AA"/>
+                </a:solidFill>
+                <a:latin typeface="Calibri"/>
+              </a:rPr>
+              <a:t>Detalle de subasta en vivo</a:t>
+            </a:r>
           </a:p>
         </p:txBody>
       </p:sp>
       <p:pic>
         <p:nvPicPr>
-          <p:cNvPr id="14" name="Picture 13" descr="renew-wordmark-black.png"/>
+          <p:cNvPr id="11" name="Picture 10" descr="renew-wordmark-black.png"/>
           <p:cNvPicPr>
             <a:picLocks noChangeAspect="1"/>
           </p:cNvPicPr>
@@ -4959,7 +4872,7 @@
       </p:pic>
       <p:sp>
         <p:nvSpPr>
-          <p:cNvPr id="15" name="TextBox 14"/>
+          <p:cNvPr id="12" name="TextBox 11"/>
           <p:cNvSpPr txBox="1"/>
           <p:nvPr/>
         </p:nvSpPr>
@@ -6543,7 +6456,7 @@
         <p:spPr>
           <a:xfrm>
             <a:off x="841248" y="1353312"/>
-            <a:ext cx="10509199" cy="868680"/>
+            <a:ext cx="5120640" cy="1280160"/>
           </a:xfrm>
           <a:prstGeom prst="rect">
             <a:avLst/>
@@ -6557,7 +6470,7 @@
           <a:lstStyle/>
           <a:p>
             <a:r>
-              <a:rPr sz="3000" b="1" spc="-40">
+              <a:rPr sz="2700" b="1" spc="-40">
                 <a:solidFill>
                   <a:srgbClr val="0A0A0A"/>
                 </a:solidFill>
@@ -6576,8 +6489,8 @@
         </p:nvSpPr>
         <p:spPr>
           <a:xfrm>
-            <a:off x="841248" y="2194560"/>
-            <a:ext cx="9601200" cy="822960"/>
+            <a:off x="841248" y="1938528"/>
+            <a:ext cx="5120640" cy="1097280"/>
           </a:xfrm>
           <a:prstGeom prst="rect">
             <a:avLst/>
@@ -6592,11 +6505,11 @@
           <a:p>
             <a:pPr>
               <a:lnSpc>
-                <a:spcPct val="135000"/>
+                <a:spcPct val="130000"/>
               </a:lnSpc>
             </a:pPr>
             <a:r>
-              <a:rPr sz="1400" b="0">
+              <a:rPr sz="1300" b="0">
                 <a:solidFill>
                   <a:srgbClr val="52525B"/>
                 </a:solidFill>
@@ -6615,8 +6528,8 @@
         </p:nvSpPr>
         <p:spPr>
           <a:xfrm>
-            <a:off x="841248" y="2651760"/>
-            <a:ext cx="457200" cy="457200"/>
+            <a:off x="841248" y="2633472"/>
+            <a:ext cx="402336" cy="402336"/>
           </a:xfrm>
           <a:prstGeom prst="ellipse">
             <a:avLst/>
@@ -6649,7 +6562,7 @@
           <a:p>
             <a:pPr algn="ctr"/>
             <a:r>
-              <a:rPr sz="1500" b="1">
+              <a:rPr sz="1300" b="1">
                 <a:solidFill>
                   <a:srgbClr val="FFFFFF"/>
                 </a:solidFill>
@@ -6668,8 +6581,8 @@
         </p:nvSpPr>
         <p:spPr>
           <a:xfrm>
-            <a:off x="1554480" y="2633472"/>
-            <a:ext cx="9795967" cy="676656"/>
+            <a:off x="1463040" y="2615184"/>
+            <a:ext cx="4498848" cy="680313"/>
           </a:xfrm>
           <a:prstGeom prst="rect">
             <a:avLst/>
@@ -6683,7 +6596,7 @@
           <a:lstStyle/>
           <a:p>
             <a:r>
-              <a:rPr sz="1500" b="1">
+              <a:rPr sz="1350" b="1">
                 <a:solidFill>
                   <a:srgbClr val="0A0A0A"/>
                 </a:solidFill>
@@ -6695,11 +6608,11 @@
           <a:p>
             <a:pPr>
               <a:lnSpc>
-                <a:spcPct val="128000"/>
+                <a:spcPct val="125000"/>
               </a:lnSpc>
             </a:pPr>
             <a:r>
-              <a:rPr sz="1250" b="0">
+              <a:rPr sz="1100" b="0">
                 <a:solidFill>
                   <a:srgbClr val="52525B"/>
                 </a:solidFill>
@@ -6718,8 +6631,8 @@
         </p:nvSpPr>
         <p:spPr>
           <a:xfrm>
-            <a:off x="841248" y="3328416"/>
-            <a:ext cx="457200" cy="457200"/>
+            <a:off x="841248" y="3313785"/>
+            <a:ext cx="402336" cy="402336"/>
           </a:xfrm>
           <a:prstGeom prst="ellipse">
             <a:avLst/>
@@ -6752,7 +6665,7 @@
           <a:p>
             <a:pPr algn="ctr"/>
             <a:r>
-              <a:rPr sz="1500" b="1">
+              <a:rPr sz="1300" b="1">
                 <a:solidFill>
                   <a:srgbClr val="FFFFFF"/>
                 </a:solidFill>
@@ -6771,8 +6684,8 @@
         </p:nvSpPr>
         <p:spPr>
           <a:xfrm>
-            <a:off x="1554480" y="3310128"/>
-            <a:ext cx="9795967" cy="676656"/>
+            <a:off x="1463040" y="3295497"/>
+            <a:ext cx="4498848" cy="680313"/>
           </a:xfrm>
           <a:prstGeom prst="rect">
             <a:avLst/>
@@ -6786,7 +6699,7 @@
           <a:lstStyle/>
           <a:p>
             <a:r>
-              <a:rPr sz="1500" b="1">
+              <a:rPr sz="1350" b="1">
                 <a:solidFill>
                   <a:srgbClr val="0A0A0A"/>
                 </a:solidFill>
@@ -6798,11 +6711,11 @@
           <a:p>
             <a:pPr>
               <a:lnSpc>
-                <a:spcPct val="128000"/>
+                <a:spcPct val="125000"/>
               </a:lnSpc>
             </a:pPr>
             <a:r>
-              <a:rPr sz="1250" b="0">
+              <a:rPr sz="1100" b="0">
                 <a:solidFill>
                   <a:srgbClr val="52525B"/>
                 </a:solidFill>
@@ -6821,8 +6734,8 @@
         </p:nvSpPr>
         <p:spPr>
           <a:xfrm>
-            <a:off x="841248" y="4005072"/>
-            <a:ext cx="457200" cy="457200"/>
+            <a:off x="841248" y="3994098"/>
+            <a:ext cx="402336" cy="402336"/>
           </a:xfrm>
           <a:prstGeom prst="ellipse">
             <a:avLst/>
@@ -6855,7 +6768,7 @@
           <a:p>
             <a:pPr algn="ctr"/>
             <a:r>
-              <a:rPr sz="1500" b="1">
+              <a:rPr sz="1300" b="1">
                 <a:solidFill>
                   <a:srgbClr val="FFFFFF"/>
                 </a:solidFill>
@@ -6874,8 +6787,8 @@
         </p:nvSpPr>
         <p:spPr>
           <a:xfrm>
-            <a:off x="1554480" y="3986784"/>
-            <a:ext cx="9795967" cy="676656"/>
+            <a:off x="1463040" y="3975810"/>
+            <a:ext cx="4498848" cy="680313"/>
           </a:xfrm>
           <a:prstGeom prst="rect">
             <a:avLst/>
@@ -6889,7 +6802,7 @@
           <a:lstStyle/>
           <a:p>
             <a:r>
-              <a:rPr sz="1500" b="1">
+              <a:rPr sz="1350" b="1">
                 <a:solidFill>
                   <a:srgbClr val="0A0A0A"/>
                 </a:solidFill>
@@ -6901,11 +6814,11 @@
           <a:p>
             <a:pPr>
               <a:lnSpc>
-                <a:spcPct val="128000"/>
+                <a:spcPct val="125000"/>
               </a:lnSpc>
             </a:pPr>
             <a:r>
-              <a:rPr sz="1250" b="0">
+              <a:rPr sz="1100" b="0">
                 <a:solidFill>
                   <a:srgbClr val="52525B"/>
                 </a:solidFill>
@@ -6924,8 +6837,8 @@
         </p:nvSpPr>
         <p:spPr>
           <a:xfrm>
-            <a:off x="841248" y="4681728"/>
-            <a:ext cx="457200" cy="457200"/>
+            <a:off x="841248" y="4674411"/>
+            <a:ext cx="402336" cy="402336"/>
           </a:xfrm>
           <a:prstGeom prst="ellipse">
             <a:avLst/>
@@ -6958,7 +6871,7 @@
           <a:p>
             <a:pPr algn="ctr"/>
             <a:r>
-              <a:rPr sz="1500" b="1">
+              <a:rPr sz="1300" b="1">
                 <a:solidFill>
                   <a:srgbClr val="FFFFFF"/>
                 </a:solidFill>
@@ -6977,8 +6890,8 @@
         </p:nvSpPr>
         <p:spPr>
           <a:xfrm>
-            <a:off x="1554480" y="4663440"/>
-            <a:ext cx="9795967" cy="676656"/>
+            <a:off x="1463040" y="4656123"/>
+            <a:ext cx="4498848" cy="680313"/>
           </a:xfrm>
           <a:prstGeom prst="rect">
             <a:avLst/>
@@ -6992,7 +6905,7 @@
           <a:lstStyle/>
           <a:p>
             <a:r>
-              <a:rPr sz="1500" b="1">
+              <a:rPr sz="1350" b="1">
                 <a:solidFill>
                   <a:srgbClr val="0A0A0A"/>
                 </a:solidFill>
@@ -7004,11 +6917,11 @@
           <a:p>
             <a:pPr>
               <a:lnSpc>
-                <a:spcPct val="128000"/>
+                <a:spcPct val="125000"/>
               </a:lnSpc>
             </a:pPr>
             <a:r>
-              <a:rPr sz="1250" b="0">
+              <a:rPr sz="1100" b="0">
                 <a:solidFill>
                   <a:srgbClr val="52525B"/>
                 </a:solidFill>
@@ -7027,8 +6940,8 @@
         </p:nvSpPr>
         <p:spPr>
           <a:xfrm>
-            <a:off x="841248" y="5358384"/>
-            <a:ext cx="457200" cy="457200"/>
+            <a:off x="841248" y="5354724"/>
+            <a:ext cx="402336" cy="402336"/>
           </a:xfrm>
           <a:prstGeom prst="ellipse">
             <a:avLst/>
@@ -7061,7 +6974,7 @@
           <a:p>
             <a:pPr algn="ctr"/>
             <a:r>
-              <a:rPr sz="1500" b="1">
+              <a:rPr sz="1300" b="1">
                 <a:solidFill>
                   <a:srgbClr val="FFFFFF"/>
                 </a:solidFill>
@@ -7080,8 +6993,8 @@
         </p:nvSpPr>
         <p:spPr>
           <a:xfrm>
-            <a:off x="1554480" y="5340096"/>
-            <a:ext cx="9795967" cy="676656"/>
+            <a:off x="1463040" y="5336436"/>
+            <a:ext cx="4498848" cy="680313"/>
           </a:xfrm>
           <a:prstGeom prst="rect">
             <a:avLst/>
@@ -7095,7 +7008,7 @@
           <a:lstStyle/>
           <a:p>
             <a:r>
-              <a:rPr sz="1500" b="1">
+              <a:rPr sz="1350" b="1">
                 <a:solidFill>
                   <a:srgbClr val="0A0A0A"/>
                 </a:solidFill>
@@ -7107,24 +7020,93 @@
           <a:p>
             <a:pPr>
               <a:lnSpc>
-                <a:spcPct val="128000"/>
+                <a:spcPct val="125000"/>
               </a:lnSpc>
             </a:pPr>
             <a:r>
-              <a:rPr sz="1250" b="0">
+              <a:rPr sz="1100" b="0">
                 <a:solidFill>
                   <a:srgbClr val="52525B"/>
                 </a:solidFill>
                 <a:latin typeface="Calibri"/>
               </a:rPr>
               <a:t>Hasta 20 imágenes. Arrastrá para ordenarlas; la primera es la portada.</a:t>
+            </a:r>
+          </a:p>
+        </p:txBody>
+      </p:sp>
+      <p:sp>
+        <p:nvSpPr>
+          <p:cNvPr id="16" name="Rounded Rectangle 15"/>
+          <p:cNvSpPr/>
+          <p:nvPr/>
+        </p:nvSpPr>
+        <p:spPr>
+          <a:xfrm>
+            <a:off x="6419088" y="932688"/>
+            <a:ext cx="4931359" cy="5010912"/>
+          </a:xfrm>
+          <a:prstGeom prst="roundRect">
+            <a:avLst>
+              <a:gd name="adj" fmla="val 4000"/>
+            </a:avLst>
+          </a:prstGeom>
+          <a:solidFill>
+            <a:srgbClr val="F1F1F3"/>
+          </a:solidFill>
+          <a:ln w="12700">
+            <a:solidFill>
+              <a:srgbClr val="A1A1AA"/>
+            </a:solidFill>
+          </a:ln>
+          <a:effectLst/>
+        </p:spPr>
+        <p:style>
+          <a:lnRef idx="1">
+            <a:schemeClr val="accent1"/>
+          </a:lnRef>
+          <a:fillRef idx="3">
+            <a:schemeClr val="accent1"/>
+          </a:fillRef>
+          <a:effectRef idx="2">
+            <a:schemeClr val="accent1"/>
+          </a:effectRef>
+          <a:fontRef idx="minor">
+            <a:schemeClr val="lt1"/>
+          </a:fontRef>
+        </p:style>
+        <p:txBody>
+          <a:bodyPr rtlCol="0" anchor="ctr" wrap="square"/>
+          <a:lstStyle/>
+          <a:p>
+            <a:pPr algn="ctr"/>
+            <a:r>
+              <a:rPr sz="1200" b="1" spc="120">
+                <a:solidFill>
+                  <a:srgbClr val="71717A"/>
+                </a:solidFill>
+                <a:latin typeface="Calibri"/>
+              </a:rPr>
+              <a:t>CAPTURA PENDIENTE</a:t>
+            </a:r>
+          </a:p>
+          <a:p>
+            <a:pPr algn="ctr"/>
+            <a:r>
+              <a:rPr sz="1050" b="0">
+                <a:solidFill>
+                  <a:srgbClr val="A1A1AA"/>
+                </a:solidFill>
+                <a:latin typeface="Calibri"/>
+              </a:rPr>
+              <a:t>Formulario de carga de vehículo</a:t>
             </a:r>
           </a:p>
         </p:txBody>
       </p:sp>
       <p:pic>
         <p:nvPicPr>
-          <p:cNvPr id="16" name="Picture 15" descr="renew-wordmark-black.png"/>
+          <p:cNvPr id="17" name="Picture 16" descr="renew-wordmark-black.png"/>
           <p:cNvPicPr>
             <a:picLocks noChangeAspect="1"/>
           </p:cNvPicPr>
@@ -7148,7 +7130,7 @@
       </p:pic>
       <p:sp>
         <p:nvSpPr>
-          <p:cNvPr id="17" name="TextBox 16"/>
+          <p:cNvPr id="18" name="TextBox 17"/>
           <p:cNvSpPr txBox="1"/>
           <p:nvPr/>
         </p:nvSpPr>
@@ -8586,7 +8568,7 @@
         <p:spPr>
           <a:xfrm>
             <a:off x="841248" y="1353312"/>
-            <a:ext cx="10509199" cy="868680"/>
+            <a:ext cx="5120640" cy="1280160"/>
           </a:xfrm>
           <a:prstGeom prst="rect">
             <a:avLst/>
@@ -8600,7 +8582,7 @@
           <a:lstStyle/>
           <a:p>
             <a:r>
-              <a:rPr sz="3000" b="1" spc="-40">
+              <a:rPr sz="2700" b="1" spc="-40">
                 <a:solidFill>
                   <a:srgbClr val="0A0A0A"/>
                 </a:solidFill>
@@ -8619,8 +8601,8 @@
         </p:nvSpPr>
         <p:spPr>
           <a:xfrm>
-            <a:off x="841248" y="2194560"/>
-            <a:ext cx="9601200" cy="822960"/>
+            <a:off x="841248" y="1938528"/>
+            <a:ext cx="5120640" cy="1097280"/>
           </a:xfrm>
           <a:prstGeom prst="rect">
             <a:avLst/>
@@ -8635,11 +8617,11 @@
           <a:p>
             <a:pPr>
               <a:lnSpc>
-                <a:spcPct val="135000"/>
+                <a:spcPct val="130000"/>
               </a:lnSpc>
             </a:pPr>
             <a:r>
-              <a:rPr sz="1400" b="0">
+              <a:rPr sz="1300" b="0">
                 <a:solidFill>
                   <a:srgbClr val="52525B"/>
                 </a:solidFill>
@@ -8658,8 +8640,8 @@
         </p:nvSpPr>
         <p:spPr>
           <a:xfrm>
-            <a:off x="841248" y="2651760"/>
-            <a:ext cx="457200" cy="457200"/>
+            <a:off x="841248" y="2633472"/>
+            <a:ext cx="402336" cy="402336"/>
           </a:xfrm>
           <a:prstGeom prst="ellipse">
             <a:avLst/>
@@ -8692,7 +8674,7 @@
           <a:p>
             <a:pPr algn="ctr"/>
             <a:r>
-              <a:rPr sz="1500" b="1">
+              <a:rPr sz="1300" b="1">
                 <a:solidFill>
                   <a:srgbClr val="FFFFFF"/>
                 </a:solidFill>
@@ -8711,8 +8693,8 @@
         </p:nvSpPr>
         <p:spPr>
           <a:xfrm>
-            <a:off x="1554480" y="2633472"/>
-            <a:ext cx="9795967" cy="845820"/>
+            <a:off x="1463040" y="2615184"/>
+            <a:ext cx="4498848" cy="850392"/>
           </a:xfrm>
           <a:prstGeom prst="rect">
             <a:avLst/>
@@ -8726,7 +8708,7 @@
           <a:lstStyle/>
           <a:p>
             <a:r>
-              <a:rPr sz="1500" b="1">
+              <a:rPr sz="1350" b="1">
                 <a:solidFill>
                   <a:srgbClr val="0A0A0A"/>
                 </a:solidFill>
@@ -8738,11 +8720,11 @@
           <a:p>
             <a:pPr>
               <a:lnSpc>
-                <a:spcPct val="128000"/>
+                <a:spcPct val="125000"/>
               </a:lnSpc>
             </a:pPr>
             <a:r>
-              <a:rPr sz="1250" b="0">
+              <a:rPr sz="1100" b="0">
                 <a:solidFill>
                   <a:srgbClr val="52525B"/>
                 </a:solidFill>
@@ -8761,8 +8743,8 @@
         </p:nvSpPr>
         <p:spPr>
           <a:xfrm>
-            <a:off x="841248" y="3497580"/>
-            <a:ext cx="457200" cy="457200"/>
+            <a:off x="841248" y="3483864"/>
+            <a:ext cx="402336" cy="402336"/>
           </a:xfrm>
           <a:prstGeom prst="ellipse">
             <a:avLst/>
@@ -8795,7 +8777,7 @@
           <a:p>
             <a:pPr algn="ctr"/>
             <a:r>
-              <a:rPr sz="1500" b="1">
+              <a:rPr sz="1300" b="1">
                 <a:solidFill>
                   <a:srgbClr val="FFFFFF"/>
                 </a:solidFill>
@@ -8814,8 +8796,8 @@
         </p:nvSpPr>
         <p:spPr>
           <a:xfrm>
-            <a:off x="1554480" y="3479292"/>
-            <a:ext cx="9795967" cy="845820"/>
+            <a:off x="1463040" y="3465576"/>
+            <a:ext cx="4498848" cy="850392"/>
           </a:xfrm>
           <a:prstGeom prst="rect">
             <a:avLst/>
@@ -8829,7 +8811,7 @@
           <a:lstStyle/>
           <a:p>
             <a:r>
-              <a:rPr sz="1500" b="1">
+              <a:rPr sz="1350" b="1">
                 <a:solidFill>
                   <a:srgbClr val="0A0A0A"/>
                 </a:solidFill>
@@ -8841,11 +8823,11 @@
           <a:p>
             <a:pPr>
               <a:lnSpc>
-                <a:spcPct val="128000"/>
+                <a:spcPct val="125000"/>
               </a:lnSpc>
             </a:pPr>
             <a:r>
-              <a:rPr sz="1250" b="0">
+              <a:rPr sz="1100" b="0">
                 <a:solidFill>
                   <a:srgbClr val="52525B"/>
                 </a:solidFill>
@@ -8864,8 +8846,8 @@
         </p:nvSpPr>
         <p:spPr>
           <a:xfrm>
-            <a:off x="841248" y="4343400"/>
-            <a:ext cx="457200" cy="457200"/>
+            <a:off x="841248" y="4334256"/>
+            <a:ext cx="402336" cy="402336"/>
           </a:xfrm>
           <a:prstGeom prst="ellipse">
             <a:avLst/>
@@ -8898,7 +8880,7 @@
           <a:p>
             <a:pPr algn="ctr"/>
             <a:r>
-              <a:rPr sz="1500" b="1">
+              <a:rPr sz="1300" b="1">
                 <a:solidFill>
                   <a:srgbClr val="FFFFFF"/>
                 </a:solidFill>
@@ -8917,8 +8899,8 @@
         </p:nvSpPr>
         <p:spPr>
           <a:xfrm>
-            <a:off x="1554480" y="4325112"/>
-            <a:ext cx="9795967" cy="845820"/>
+            <a:off x="1463040" y="4315968"/>
+            <a:ext cx="4498848" cy="850392"/>
           </a:xfrm>
           <a:prstGeom prst="rect">
             <a:avLst/>
@@ -8932,7 +8914,7 @@
           <a:lstStyle/>
           <a:p>
             <a:r>
-              <a:rPr sz="1500" b="1">
+              <a:rPr sz="1350" b="1">
                 <a:solidFill>
                   <a:srgbClr val="0A0A0A"/>
                 </a:solidFill>
@@ -8944,11 +8926,11 @@
           <a:p>
             <a:pPr>
               <a:lnSpc>
-                <a:spcPct val="128000"/>
+                <a:spcPct val="125000"/>
               </a:lnSpc>
             </a:pPr>
             <a:r>
-              <a:rPr sz="1250" b="0">
+              <a:rPr sz="1100" b="0">
                 <a:solidFill>
                   <a:srgbClr val="52525B"/>
                 </a:solidFill>
@@ -8967,8 +8949,8 @@
         </p:nvSpPr>
         <p:spPr>
           <a:xfrm>
-            <a:off x="841248" y="5189220"/>
-            <a:ext cx="457200" cy="457200"/>
+            <a:off x="841248" y="5184648"/>
+            <a:ext cx="402336" cy="402336"/>
           </a:xfrm>
           <a:prstGeom prst="ellipse">
             <a:avLst/>
@@ -9001,7 +8983,7 @@
           <a:p>
             <a:pPr algn="ctr"/>
             <a:r>
-              <a:rPr sz="1500" b="1">
+              <a:rPr sz="1300" b="1">
                 <a:solidFill>
                   <a:srgbClr val="FFFFFF"/>
                 </a:solidFill>
@@ -9020,8 +9002,8 @@
         </p:nvSpPr>
         <p:spPr>
           <a:xfrm>
-            <a:off x="1554480" y="5170932"/>
-            <a:ext cx="9795967" cy="845820"/>
+            <a:off x="1463040" y="5166360"/>
+            <a:ext cx="4498848" cy="850392"/>
           </a:xfrm>
           <a:prstGeom prst="rect">
             <a:avLst/>
@@ -9035,7 +9017,7 @@
           <a:lstStyle/>
           <a:p>
             <a:r>
-              <a:rPr sz="1500" b="1">
+              <a:rPr sz="1350" b="1">
                 <a:solidFill>
                   <a:srgbClr val="0A0A0A"/>
                 </a:solidFill>
@@ -9047,24 +9029,93 @@
           <a:p>
             <a:pPr>
               <a:lnSpc>
-                <a:spcPct val="128000"/>
+                <a:spcPct val="125000"/>
               </a:lnSpc>
             </a:pPr>
             <a:r>
-              <a:rPr sz="1250" b="0">
+              <a:rPr sz="1100" b="0">
                 <a:solidFill>
                   <a:srgbClr val="52525B"/>
                 </a:solidFill>
                 <a:latin typeface="Calibri"/>
               </a:rPr>
               <a:t>Fecha y hora de apertura y cierre. El fin debe ser al menos 1 minuto después del inicio.</a:t>
+            </a:r>
+          </a:p>
+        </p:txBody>
+      </p:sp>
+      <p:sp>
+        <p:nvSpPr>
+          <p:cNvPr id="14" name="Rounded Rectangle 13"/>
+          <p:cNvSpPr/>
+          <p:nvPr/>
+        </p:nvSpPr>
+        <p:spPr>
+          <a:xfrm>
+            <a:off x="6419088" y="932688"/>
+            <a:ext cx="4931359" cy="5010912"/>
+          </a:xfrm>
+          <a:prstGeom prst="roundRect">
+            <a:avLst>
+              <a:gd name="adj" fmla="val 4000"/>
+            </a:avLst>
+          </a:prstGeom>
+          <a:solidFill>
+            <a:srgbClr val="F1F1F3"/>
+          </a:solidFill>
+          <a:ln w="12700">
+            <a:solidFill>
+              <a:srgbClr val="A1A1AA"/>
+            </a:solidFill>
+          </a:ln>
+          <a:effectLst/>
+        </p:spPr>
+        <p:style>
+          <a:lnRef idx="1">
+            <a:schemeClr val="accent1"/>
+          </a:lnRef>
+          <a:fillRef idx="3">
+            <a:schemeClr val="accent1"/>
+          </a:fillRef>
+          <a:effectRef idx="2">
+            <a:schemeClr val="accent1"/>
+          </a:effectRef>
+          <a:fontRef idx="minor">
+            <a:schemeClr val="lt1"/>
+          </a:fontRef>
+        </p:style>
+        <p:txBody>
+          <a:bodyPr rtlCol="0" anchor="ctr" wrap="square"/>
+          <a:lstStyle/>
+          <a:p>
+            <a:pPr algn="ctr"/>
+            <a:r>
+              <a:rPr sz="1200" b="1" spc="120">
+                <a:solidFill>
+                  <a:srgbClr val="71717A"/>
+                </a:solidFill>
+                <a:latin typeface="Calibri"/>
+              </a:rPr>
+              <a:t>CAPTURA PENDIENTE</a:t>
+            </a:r>
+          </a:p>
+          <a:p>
+            <a:pPr algn="ctr"/>
+            <a:r>
+              <a:rPr sz="1050" b="0">
+                <a:solidFill>
+                  <a:srgbClr val="A1A1AA"/>
+                </a:solidFill>
+                <a:latin typeface="Calibri"/>
+              </a:rPr>
+              <a:t>Formulario de creación de subasta</a:t>
             </a:r>
           </a:p>
         </p:txBody>
       </p:sp>
       <p:pic>
         <p:nvPicPr>
-          <p:cNvPr id="14" name="Picture 13" descr="renew-wordmark-black.png"/>
+          <p:cNvPr id="15" name="Picture 14" descr="renew-wordmark-black.png"/>
           <p:cNvPicPr>
             <a:picLocks noChangeAspect="1"/>
           </p:cNvPicPr>
@@ -9088,7 +9139,7 @@
       </p:pic>
       <p:sp>
         <p:nvSpPr>
-          <p:cNvPr id="15" name="TextBox 14"/>
+          <p:cNvPr id="16" name="TextBox 15"/>
           <p:cNvSpPr txBox="1"/>
           <p:nvPr/>
         </p:nvSpPr>

--- a/docs/onboarding/pptx/03-staff.pptx
+++ b/docs/onboarding/pptx/03-staff.pptx
@@ -3314,7 +3314,7 @@
                 </a:solidFill>
                 <a:latin typeface="Calibri"/>
               </a:rPr>
-              <a:t>    Santa Rosa Automotores · Paraguay</a:t>
+              <a:t>    Santa Rosa Paraguay SA · Paraguay</a:t>
             </a:r>
           </a:p>
         </p:txBody>
@@ -5559,7 +5559,7 @@
                 </a:solidFill>
                 <a:latin typeface="Calibri"/>
               </a:rPr>
-              <a:t>Renew Subastas · Santa Rosa Automotores</a:t>
+              <a:t>Renew Subastas · Santa Rosa Paraguay SA</a:t>
             </a:r>
           </a:p>
         </p:txBody>
